--- a/video-juegos/template/FINAL-plantilla-videojuegos.pptx
+++ b/video-juegos/template/FINAL-plantilla-videojuegos.pptx
@@ -150,6 +150,8 @@
 <file path=ppt/revisionInfo.xml><?xml version="1.0" encoding="utf-8"?>
 <p1510:revInfo xmlns:a="http://schemas.openxmlformats.org/drawingml/2006/main" xmlns:r="http://schemas.openxmlformats.org/officeDocument/2006/relationships" xmlns:p1510="http://schemas.microsoft.com/office/powerpoint/2015/10/main">
   <p1510:revLst>
+    <p1510:client id="{5D4CB4AA-7267-432D-6C38-C513601E3CD2}" v="13" dt="2026-10-23T16:30:06.463"/>
+    <p1510:client id="{91CA72EA-7353-6BCA-466A-17D6A90A6378}" v="24" dt="2026-10-22T20:03:43.935"/>
     <p1510:client id="{D1220DAA-905C-D6B4-1BE5-F75CF703FAC8}" v="279" dt="2026-10-22T14:56:39.847"/>
   </p1510:revLst>
 </p1510:revInfo>
@@ -157,6 +159,181 @@
 
 <file path=ppt/changesInfos/changesInfo1.xml><?xml version="1.0" encoding="utf-8"?>
 <pc:chgInfo xmlns:a="http://schemas.openxmlformats.org/drawingml/2006/main" xmlns:r="http://schemas.openxmlformats.org/officeDocument/2006/relationships" xmlns:ac="http://schemas.microsoft.com/office/drawing/2013/main/command" xmlns:pc="http://schemas.microsoft.com/office/powerpoint/2013/main/command">
+  <pc:docChgLst>
+    <pc:chgData name="Alfonso Balandra Antelis" userId="S::abala@tec.mx::28ba9e3f-8dae-4bf5-851d-5bb8a2fa86a5" providerId="AD" clId="Web-{91CA72EA-7353-6BCA-466A-17D6A90A6378}"/>
+    <pc:docChg chg="modSld">
+      <pc:chgData name="Alfonso Balandra Antelis" userId="S::abala@tec.mx::28ba9e3f-8dae-4bf5-851d-5bb8a2fa86a5" providerId="AD" clId="Web-{91CA72EA-7353-6BCA-466A-17D6A90A6378}" dt="2026-10-22T20:03:43.935" v="23" actId="1076"/>
+      <pc:docMkLst>
+        <pc:docMk/>
+      </pc:docMkLst>
+      <pc:sldChg chg="modSp">
+        <pc:chgData name="Alfonso Balandra Antelis" userId="S::abala@tec.mx::28ba9e3f-8dae-4bf5-851d-5bb8a2fa86a5" providerId="AD" clId="Web-{91CA72EA-7353-6BCA-466A-17D6A90A6378}" dt="2026-10-22T20:03:30.997" v="7" actId="1076"/>
+        <pc:sldMkLst>
+          <pc:docMk/>
+          <pc:sldMk cId="0" sldId="279"/>
+        </pc:sldMkLst>
+        <pc:spChg chg="mod">
+          <ac:chgData name="Alfonso Balandra Antelis" userId="S::abala@tec.mx::28ba9e3f-8dae-4bf5-851d-5bb8a2fa86a5" providerId="AD" clId="Web-{91CA72EA-7353-6BCA-466A-17D6A90A6378}" dt="2026-10-22T20:03:30.966" v="4" actId="1076"/>
+          <ac:spMkLst>
+            <pc:docMk/>
+            <pc:sldMk cId="0" sldId="279"/>
+            <ac:spMk id="12" creationId="{00000000-0000-0000-0000-000000000000}"/>
+          </ac:spMkLst>
+        </pc:spChg>
+        <pc:spChg chg="mod">
+          <ac:chgData name="Alfonso Balandra Antelis" userId="S::abala@tec.mx::28ba9e3f-8dae-4bf5-851d-5bb8a2fa86a5" providerId="AD" clId="Web-{91CA72EA-7353-6BCA-466A-17D6A90A6378}" dt="2026-10-22T20:03:30.981" v="5" actId="1076"/>
+          <ac:spMkLst>
+            <pc:docMk/>
+            <pc:sldMk cId="0" sldId="279"/>
+            <ac:spMk id="16" creationId="{00000000-0000-0000-0000-000000000000}"/>
+          </ac:spMkLst>
+        </pc:spChg>
+        <pc:spChg chg="mod">
+          <ac:chgData name="Alfonso Balandra Antelis" userId="S::abala@tec.mx::28ba9e3f-8dae-4bf5-851d-5bb8a2fa86a5" providerId="AD" clId="Web-{91CA72EA-7353-6BCA-466A-17D6A90A6378}" dt="2026-10-22T20:03:30.981" v="6" actId="1076"/>
+          <ac:spMkLst>
+            <pc:docMk/>
+            <pc:sldMk cId="0" sldId="279"/>
+            <ac:spMk id="24" creationId="{00000000-0000-0000-0000-000000000000}"/>
+          </ac:spMkLst>
+        </pc:spChg>
+        <pc:spChg chg="mod">
+          <ac:chgData name="Alfonso Balandra Antelis" userId="S::abala@tec.mx::28ba9e3f-8dae-4bf5-851d-5bb8a2fa86a5" providerId="AD" clId="Web-{91CA72EA-7353-6BCA-466A-17D6A90A6378}" dt="2026-10-22T20:03:30.997" v="7" actId="1076"/>
+          <ac:spMkLst>
+            <pc:docMk/>
+            <pc:sldMk cId="0" sldId="279"/>
+            <ac:spMk id="28" creationId="{00000000-0000-0000-0000-000000000000}"/>
+          </ac:spMkLst>
+        </pc:spChg>
+      </pc:sldChg>
+      <pc:sldChg chg="modSp">
+        <pc:chgData name="Alfonso Balandra Antelis" userId="S::abala@tec.mx::28ba9e3f-8dae-4bf5-851d-5bb8a2fa86a5" providerId="AD" clId="Web-{91CA72EA-7353-6BCA-466A-17D6A90A6378}" dt="2026-10-22T20:03:43.935" v="23" actId="1076"/>
+        <pc:sldMkLst>
+          <pc:docMk/>
+          <pc:sldMk cId="0" sldId="280"/>
+        </pc:sldMkLst>
+        <pc:spChg chg="mod">
+          <ac:chgData name="Alfonso Balandra Antelis" userId="S::abala@tec.mx::28ba9e3f-8dae-4bf5-851d-5bb8a2fa86a5" providerId="AD" clId="Web-{91CA72EA-7353-6BCA-466A-17D6A90A6378}" dt="2026-10-22T20:03:39.247" v="8"/>
+          <ac:spMkLst>
+            <pc:docMk/>
+            <pc:sldMk cId="0" sldId="280"/>
+            <ac:spMk id="3" creationId="{00000000-0000-0000-0000-000000000000}"/>
+          </ac:spMkLst>
+        </pc:spChg>
+        <pc:spChg chg="mod">
+          <ac:chgData name="Alfonso Balandra Antelis" userId="S::abala@tec.mx::28ba9e3f-8dae-4bf5-851d-5bb8a2fa86a5" providerId="AD" clId="Web-{91CA72EA-7353-6BCA-466A-17D6A90A6378}" dt="2026-10-22T20:03:39.247" v="9"/>
+          <ac:spMkLst>
+            <pc:docMk/>
+            <pc:sldMk cId="0" sldId="280"/>
+            <ac:spMk id="4" creationId="{00000000-0000-0000-0000-000000000000}"/>
+          </ac:spMkLst>
+        </pc:spChg>
+        <pc:spChg chg="mod">
+          <ac:chgData name="Alfonso Balandra Antelis" userId="S::abala@tec.mx::28ba9e3f-8dae-4bf5-851d-5bb8a2fa86a5" providerId="AD" clId="Web-{91CA72EA-7353-6BCA-466A-17D6A90A6378}" dt="2026-10-22T20:03:43.935" v="23" actId="1076"/>
+          <ac:spMkLst>
+            <pc:docMk/>
+            <pc:sldMk cId="0" sldId="280"/>
+            <ac:spMk id="5" creationId="{00000000-0000-0000-0000-000000000000}"/>
+          </ac:spMkLst>
+        </pc:spChg>
+        <pc:spChg chg="mod">
+          <ac:chgData name="Alfonso Balandra Antelis" userId="S::abala@tec.mx::28ba9e3f-8dae-4bf5-851d-5bb8a2fa86a5" providerId="AD" clId="Web-{91CA72EA-7353-6BCA-466A-17D6A90A6378}" dt="2026-10-22T20:03:39.247" v="11"/>
+          <ac:spMkLst>
+            <pc:docMk/>
+            <pc:sldMk cId="0" sldId="280"/>
+            <ac:spMk id="6" creationId="{00000000-0000-0000-0000-000000000000}"/>
+          </ac:spMkLst>
+        </pc:spChg>
+        <pc:spChg chg="mod">
+          <ac:chgData name="Alfonso Balandra Antelis" userId="S::abala@tec.mx::28ba9e3f-8dae-4bf5-851d-5bb8a2fa86a5" providerId="AD" clId="Web-{91CA72EA-7353-6BCA-466A-17D6A90A6378}" dt="2026-10-22T20:03:39.247" v="12"/>
+          <ac:spMkLst>
+            <pc:docMk/>
+            <pc:sldMk cId="0" sldId="280"/>
+            <ac:spMk id="9" creationId="{00000000-0000-0000-0000-000000000000}"/>
+          </ac:spMkLst>
+        </pc:spChg>
+        <pc:spChg chg="mod">
+          <ac:chgData name="Alfonso Balandra Antelis" userId="S::abala@tec.mx::28ba9e3f-8dae-4bf5-851d-5bb8a2fa86a5" providerId="AD" clId="Web-{91CA72EA-7353-6BCA-466A-17D6A90A6378}" dt="2026-10-22T20:03:39.247" v="13"/>
+          <ac:spMkLst>
+            <pc:docMk/>
+            <pc:sldMk cId="0" sldId="280"/>
+            <ac:spMk id="10" creationId="{00000000-0000-0000-0000-000000000000}"/>
+          </ac:spMkLst>
+        </pc:spChg>
+        <pc:spChg chg="mod">
+          <ac:chgData name="Alfonso Balandra Antelis" userId="S::abala@tec.mx::28ba9e3f-8dae-4bf5-851d-5bb8a2fa86a5" providerId="AD" clId="Web-{91CA72EA-7353-6BCA-466A-17D6A90A6378}" dt="2026-10-22T20:03:39.247" v="14"/>
+          <ac:spMkLst>
+            <pc:docMk/>
+            <pc:sldMk cId="0" sldId="280"/>
+            <ac:spMk id="11" creationId="{00000000-0000-0000-0000-000000000000}"/>
+          </ac:spMkLst>
+        </pc:spChg>
+        <pc:spChg chg="mod">
+          <ac:chgData name="Alfonso Balandra Antelis" userId="S::abala@tec.mx::28ba9e3f-8dae-4bf5-851d-5bb8a2fa86a5" providerId="AD" clId="Web-{91CA72EA-7353-6BCA-466A-17D6A90A6378}" dt="2026-10-22T20:03:39.247" v="15"/>
+          <ac:spMkLst>
+            <pc:docMk/>
+            <pc:sldMk cId="0" sldId="280"/>
+            <ac:spMk id="12" creationId="{00000000-0000-0000-0000-000000000000}"/>
+          </ac:spMkLst>
+        </pc:spChg>
+        <pc:spChg chg="mod">
+          <ac:chgData name="Alfonso Balandra Antelis" userId="S::abala@tec.mx::28ba9e3f-8dae-4bf5-851d-5bb8a2fa86a5" providerId="AD" clId="Web-{91CA72EA-7353-6BCA-466A-17D6A90A6378}" dt="2026-10-22T20:03:39.247" v="16"/>
+          <ac:spMkLst>
+            <pc:docMk/>
+            <pc:sldMk cId="0" sldId="280"/>
+            <ac:spMk id="13" creationId="{00000000-0000-0000-0000-000000000000}"/>
+          </ac:spMkLst>
+        </pc:spChg>
+        <pc:spChg chg="mod">
+          <ac:chgData name="Alfonso Balandra Antelis" userId="S::abala@tec.mx::28ba9e3f-8dae-4bf5-851d-5bb8a2fa86a5" providerId="AD" clId="Web-{91CA72EA-7353-6BCA-466A-17D6A90A6378}" dt="2026-10-22T20:03:39.247" v="17"/>
+          <ac:spMkLst>
+            <pc:docMk/>
+            <pc:sldMk cId="0" sldId="280"/>
+            <ac:spMk id="14" creationId="{00000000-0000-0000-0000-000000000000}"/>
+          </ac:spMkLst>
+        </pc:spChg>
+        <pc:spChg chg="mod">
+          <ac:chgData name="Alfonso Balandra Antelis" userId="S::abala@tec.mx::28ba9e3f-8dae-4bf5-851d-5bb8a2fa86a5" providerId="AD" clId="Web-{91CA72EA-7353-6BCA-466A-17D6A90A6378}" dt="2026-10-22T20:03:39.247" v="18"/>
+          <ac:spMkLst>
+            <pc:docMk/>
+            <pc:sldMk cId="0" sldId="280"/>
+            <ac:spMk id="15" creationId="{00000000-0000-0000-0000-000000000000}"/>
+          </ac:spMkLst>
+        </pc:spChg>
+        <pc:spChg chg="mod">
+          <ac:chgData name="Alfonso Balandra Antelis" userId="S::abala@tec.mx::28ba9e3f-8dae-4bf5-851d-5bb8a2fa86a5" providerId="AD" clId="Web-{91CA72EA-7353-6BCA-466A-17D6A90A6378}" dt="2026-10-22T20:03:39.247" v="19"/>
+          <ac:spMkLst>
+            <pc:docMk/>
+            <pc:sldMk cId="0" sldId="280"/>
+            <ac:spMk id="16" creationId="{00000000-0000-0000-0000-000000000000}"/>
+          </ac:spMkLst>
+        </pc:spChg>
+        <pc:spChg chg="mod">
+          <ac:chgData name="Alfonso Balandra Antelis" userId="S::abala@tec.mx::28ba9e3f-8dae-4bf5-851d-5bb8a2fa86a5" providerId="AD" clId="Web-{91CA72EA-7353-6BCA-466A-17D6A90A6378}" dt="2026-10-22T20:03:39.247" v="20"/>
+          <ac:spMkLst>
+            <pc:docMk/>
+            <pc:sldMk cId="0" sldId="280"/>
+            <ac:spMk id="17" creationId="{00000000-0000-0000-0000-000000000000}"/>
+          </ac:spMkLst>
+        </pc:spChg>
+        <pc:spChg chg="mod">
+          <ac:chgData name="Alfonso Balandra Antelis" userId="S::abala@tec.mx::28ba9e3f-8dae-4bf5-851d-5bb8a2fa86a5" providerId="AD" clId="Web-{91CA72EA-7353-6BCA-466A-17D6A90A6378}" dt="2026-10-22T20:03:39.247" v="21"/>
+          <ac:spMkLst>
+            <pc:docMk/>
+            <pc:sldMk cId="0" sldId="280"/>
+            <ac:spMk id="18" creationId="{00000000-0000-0000-0000-000000000000}"/>
+          </ac:spMkLst>
+        </pc:spChg>
+        <pc:spChg chg="mod">
+          <ac:chgData name="Alfonso Balandra Antelis" userId="S::abala@tec.mx::28ba9e3f-8dae-4bf5-851d-5bb8a2fa86a5" providerId="AD" clId="Web-{91CA72EA-7353-6BCA-466A-17D6A90A6378}" dt="2026-10-22T20:03:39.451" v="22"/>
+          <ac:spMkLst>
+            <pc:docMk/>
+            <pc:sldMk cId="0" sldId="280"/>
+            <ac:spMk id="19" creationId="{00000000-0000-0000-0000-000000000000}"/>
+          </ac:spMkLst>
+        </pc:spChg>
+      </pc:sldChg>
+    </pc:docChg>
+  </pc:docChgLst>
   <pc:docChgLst>
     <pc:chgData name="Alfonso Balandra Antelis" userId="S::abala@tec.mx::28ba9e3f-8dae-4bf5-851d-5bb8a2fa86a5" providerId="AD" clId="Web-{D1220DAA-905C-D6B4-1BE5-F75CF703FAC8}"/>
     <pc:docChg chg="modSld">
@@ -1490,6 +1667,140 @@
       </pc:sldChg>
     </pc:docChg>
   </pc:docChgLst>
+  <pc:docChgLst>
+    <pc:chgData name="Alfonso Balandra Antelis" userId="S::abala@tec.mx::28ba9e3f-8dae-4bf5-851d-5bb8a2fa86a5" providerId="AD" clId="Web-{5D4CB4AA-7267-432D-6C38-C513601E3CD2}"/>
+    <pc:docChg chg="modSld">
+      <pc:chgData name="Alfonso Balandra Antelis" userId="S::abala@tec.mx::28ba9e3f-8dae-4bf5-851d-5bb8a2fa86a5" providerId="AD" clId="Web-{5D4CB4AA-7267-432D-6C38-C513601E3CD2}" dt="2026-10-23T16:30:06.463" v="12" actId="1076"/>
+      <pc:docMkLst>
+        <pc:docMk/>
+      </pc:docMkLst>
+      <pc:sldChg chg="modSp">
+        <pc:chgData name="Alfonso Balandra Antelis" userId="S::abala@tec.mx::28ba9e3f-8dae-4bf5-851d-5bb8a2fa86a5" providerId="AD" clId="Web-{5D4CB4AA-7267-432D-6C38-C513601E3CD2}" dt="2026-10-23T16:29:44.338" v="7"/>
+        <pc:sldMkLst>
+          <pc:docMk/>
+          <pc:sldMk cId="0" sldId="271"/>
+        </pc:sldMkLst>
+        <pc:spChg chg="mod">
+          <ac:chgData name="Alfonso Balandra Antelis" userId="S::abala@tec.mx::28ba9e3f-8dae-4bf5-851d-5bb8a2fa86a5" providerId="AD" clId="Web-{5D4CB4AA-7267-432D-6C38-C513601E3CD2}" dt="2026-10-23T16:29:44.166" v="0"/>
+          <ac:spMkLst>
+            <pc:docMk/>
+            <pc:sldMk cId="0" sldId="271"/>
+            <ac:spMk id="13" creationId="{00000000-0000-0000-0000-000000000000}"/>
+          </ac:spMkLst>
+        </pc:spChg>
+        <pc:spChg chg="mod">
+          <ac:chgData name="Alfonso Balandra Antelis" userId="S::abala@tec.mx::28ba9e3f-8dae-4bf5-851d-5bb8a2fa86a5" providerId="AD" clId="Web-{5D4CB4AA-7267-432D-6C38-C513601E3CD2}" dt="2026-10-23T16:29:44.166" v="1"/>
+          <ac:spMkLst>
+            <pc:docMk/>
+            <pc:sldMk cId="0" sldId="271"/>
+            <ac:spMk id="18" creationId="{00000000-0000-0000-0000-000000000000}"/>
+          </ac:spMkLst>
+        </pc:spChg>
+        <pc:spChg chg="mod">
+          <ac:chgData name="Alfonso Balandra Antelis" userId="S::abala@tec.mx::28ba9e3f-8dae-4bf5-851d-5bb8a2fa86a5" providerId="AD" clId="Web-{5D4CB4AA-7267-432D-6C38-C513601E3CD2}" dt="2026-10-23T16:29:44.166" v="2"/>
+          <ac:spMkLst>
+            <pc:docMk/>
+            <pc:sldMk cId="0" sldId="271"/>
+            <ac:spMk id="23" creationId="{00000000-0000-0000-0000-000000000000}"/>
+          </ac:spMkLst>
+        </pc:spChg>
+        <pc:spChg chg="mod">
+          <ac:chgData name="Alfonso Balandra Antelis" userId="S::abala@tec.mx::28ba9e3f-8dae-4bf5-851d-5bb8a2fa86a5" providerId="AD" clId="Web-{5D4CB4AA-7267-432D-6C38-C513601E3CD2}" dt="2026-10-23T16:29:44.166" v="3"/>
+          <ac:spMkLst>
+            <pc:docMk/>
+            <pc:sldMk cId="0" sldId="271"/>
+            <ac:spMk id="28" creationId="{00000000-0000-0000-0000-000000000000}"/>
+          </ac:spMkLst>
+        </pc:spChg>
+        <pc:spChg chg="mod">
+          <ac:chgData name="Alfonso Balandra Antelis" userId="S::abala@tec.mx::28ba9e3f-8dae-4bf5-851d-5bb8a2fa86a5" providerId="AD" clId="Web-{5D4CB4AA-7267-432D-6C38-C513601E3CD2}" dt="2026-10-23T16:29:44.166" v="4"/>
+          <ac:spMkLst>
+            <pc:docMk/>
+            <pc:sldMk cId="0" sldId="271"/>
+            <ac:spMk id="33" creationId="{00000000-0000-0000-0000-000000000000}"/>
+          </ac:spMkLst>
+        </pc:spChg>
+        <pc:spChg chg="mod">
+          <ac:chgData name="Alfonso Balandra Antelis" userId="S::abala@tec.mx::28ba9e3f-8dae-4bf5-851d-5bb8a2fa86a5" providerId="AD" clId="Web-{5D4CB4AA-7267-432D-6C38-C513601E3CD2}" dt="2026-10-23T16:29:44.166" v="5"/>
+          <ac:spMkLst>
+            <pc:docMk/>
+            <pc:sldMk cId="0" sldId="271"/>
+            <ac:spMk id="38" creationId="{00000000-0000-0000-0000-000000000000}"/>
+          </ac:spMkLst>
+        </pc:spChg>
+        <pc:spChg chg="mod">
+          <ac:chgData name="Alfonso Balandra Antelis" userId="S::abala@tec.mx::28ba9e3f-8dae-4bf5-851d-5bb8a2fa86a5" providerId="AD" clId="Web-{5D4CB4AA-7267-432D-6C38-C513601E3CD2}" dt="2026-10-23T16:29:44.166" v="6"/>
+          <ac:spMkLst>
+            <pc:docMk/>
+            <pc:sldMk cId="0" sldId="271"/>
+            <ac:spMk id="43" creationId="{00000000-0000-0000-0000-000000000000}"/>
+          </ac:spMkLst>
+        </pc:spChg>
+        <pc:spChg chg="mod">
+          <ac:chgData name="Alfonso Balandra Antelis" userId="S::abala@tec.mx::28ba9e3f-8dae-4bf5-851d-5bb8a2fa86a5" providerId="AD" clId="Web-{5D4CB4AA-7267-432D-6C38-C513601E3CD2}" dt="2026-10-23T16:29:44.338" v="7"/>
+          <ac:spMkLst>
+            <pc:docMk/>
+            <pc:sldMk cId="0" sldId="271"/>
+            <ac:spMk id="48" creationId="{00000000-0000-0000-0000-000000000000}"/>
+          </ac:spMkLst>
+        </pc:spChg>
+      </pc:sldChg>
+      <pc:sldChg chg="modSp">
+        <pc:chgData name="Alfonso Balandra Antelis" userId="S::abala@tec.mx::28ba9e3f-8dae-4bf5-851d-5bb8a2fa86a5" providerId="AD" clId="Web-{5D4CB4AA-7267-432D-6C38-C513601E3CD2}" dt="2026-10-23T16:29:58.323" v="11"/>
+        <pc:sldMkLst>
+          <pc:docMk/>
+          <pc:sldMk cId="0" sldId="274"/>
+        </pc:sldMkLst>
+        <pc:spChg chg="mod">
+          <ac:chgData name="Alfonso Balandra Antelis" userId="S::abala@tec.mx::28ba9e3f-8dae-4bf5-851d-5bb8a2fa86a5" providerId="AD" clId="Web-{5D4CB4AA-7267-432D-6C38-C513601E3CD2}" dt="2026-10-23T16:29:58.276" v="8"/>
+          <ac:spMkLst>
+            <pc:docMk/>
+            <pc:sldMk cId="0" sldId="274"/>
+            <ac:spMk id="13" creationId="{00000000-0000-0000-0000-000000000000}"/>
+          </ac:spMkLst>
+        </pc:spChg>
+        <pc:spChg chg="mod">
+          <ac:chgData name="Alfonso Balandra Antelis" userId="S::abala@tec.mx::28ba9e3f-8dae-4bf5-851d-5bb8a2fa86a5" providerId="AD" clId="Web-{5D4CB4AA-7267-432D-6C38-C513601E3CD2}" dt="2026-10-23T16:29:58.276" v="9"/>
+          <ac:spMkLst>
+            <pc:docMk/>
+            <pc:sldMk cId="0" sldId="274"/>
+            <ac:spMk id="19" creationId="{00000000-0000-0000-0000-000000000000}"/>
+          </ac:spMkLst>
+        </pc:spChg>
+        <pc:spChg chg="mod">
+          <ac:chgData name="Alfonso Balandra Antelis" userId="S::abala@tec.mx::28ba9e3f-8dae-4bf5-851d-5bb8a2fa86a5" providerId="AD" clId="Web-{5D4CB4AA-7267-432D-6C38-C513601E3CD2}" dt="2026-10-23T16:29:58.276" v="10"/>
+          <ac:spMkLst>
+            <pc:docMk/>
+            <pc:sldMk cId="0" sldId="274"/>
+            <ac:spMk id="26" creationId="{00000000-0000-0000-0000-000000000000}"/>
+          </ac:spMkLst>
+        </pc:spChg>
+        <pc:spChg chg="mod">
+          <ac:chgData name="Alfonso Balandra Antelis" userId="S::abala@tec.mx::28ba9e3f-8dae-4bf5-851d-5bb8a2fa86a5" providerId="AD" clId="Web-{5D4CB4AA-7267-432D-6C38-C513601E3CD2}" dt="2026-10-23T16:29:58.323" v="11"/>
+          <ac:spMkLst>
+            <pc:docMk/>
+            <pc:sldMk cId="0" sldId="274"/>
+            <ac:spMk id="32" creationId="{00000000-0000-0000-0000-000000000000}"/>
+          </ac:spMkLst>
+        </pc:spChg>
+      </pc:sldChg>
+      <pc:sldChg chg="modSp">
+        <pc:chgData name="Alfonso Balandra Antelis" userId="S::abala@tec.mx::28ba9e3f-8dae-4bf5-851d-5bb8a2fa86a5" providerId="AD" clId="Web-{5D4CB4AA-7267-432D-6C38-C513601E3CD2}" dt="2026-10-23T16:30:06.463" v="12" actId="1076"/>
+        <pc:sldMkLst>
+          <pc:docMk/>
+          <pc:sldMk cId="0" sldId="278"/>
+        </pc:sldMkLst>
+        <pc:spChg chg="mod">
+          <ac:chgData name="Alfonso Balandra Antelis" userId="S::abala@tec.mx::28ba9e3f-8dae-4bf5-851d-5bb8a2fa86a5" providerId="AD" clId="Web-{5D4CB4AA-7267-432D-6C38-C513601E3CD2}" dt="2026-10-23T16:30:06.463" v="12" actId="1076"/>
+          <ac:spMkLst>
+            <pc:docMk/>
+            <pc:sldMk cId="0" sldId="278"/>
+            <ac:spMk id="13" creationId="{00000000-0000-0000-0000-000000000000}"/>
+          </ac:spMkLst>
+        </pc:spChg>
+      </pc:sldChg>
+    </pc:docChg>
+  </pc:docChgLst>
 </pc:chgInfo>
 </file>
 
@@ -1574,7 +1885,7 @@
           </a:lstStyle>
           <a:p>
             <a:fld id="{8410BBB3-2B43-481D-B823-02BA206301EB}" type="datetimeFigureOut">
-              <a:t>22/10/2026</a:t>
+              <a:t>23/10/2026</a:t>
             </a:fld>
             <a:endParaRPr lang="es-ES"/>
           </a:p>
@@ -2019,7 +2330,7 @@
           <a:p>
             <a:fld id="{5BCAD085-E8A6-8845-BD4E-CB4CCA059FC4}" type="datetimeFigureOut">
               <a:rPr lang="en-US" smtClean="0"/>
-              <a:t>10/22/2026</a:t>
+              <a:t>10/23/2026</a:t>
             </a:fld>
             <a:endParaRPr lang="en-US"/>
           </a:p>
@@ -2187,7 +2498,7 @@
           <a:p>
             <a:fld id="{5BCAD085-E8A6-8845-BD4E-CB4CCA059FC4}" type="datetimeFigureOut">
               <a:rPr lang="en-US" smtClean="0"/>
-              <a:t>10/22/2026</a:t>
+              <a:t>10/23/2026</a:t>
             </a:fld>
             <a:endParaRPr lang="en-US"/>
           </a:p>
@@ -2365,7 +2676,7 @@
           <a:p>
             <a:fld id="{5BCAD085-E8A6-8845-BD4E-CB4CCA059FC4}" type="datetimeFigureOut">
               <a:rPr lang="en-US" smtClean="0"/>
-              <a:t>10/22/2026</a:t>
+              <a:t>10/23/2026</a:t>
             </a:fld>
             <a:endParaRPr lang="en-US"/>
           </a:p>
@@ -2533,7 +2844,7 @@
           <a:p>
             <a:fld id="{5BCAD085-E8A6-8845-BD4E-CB4CCA059FC4}" type="datetimeFigureOut">
               <a:rPr lang="en-US" smtClean="0"/>
-              <a:t>10/22/2026</a:t>
+              <a:t>10/23/2026</a:t>
             </a:fld>
             <a:endParaRPr lang="en-US"/>
           </a:p>
@@ -2778,7 +3089,7 @@
           <a:p>
             <a:fld id="{5BCAD085-E8A6-8845-BD4E-CB4CCA059FC4}" type="datetimeFigureOut">
               <a:rPr lang="en-US" smtClean="0"/>
-              <a:t>10/22/2026</a:t>
+              <a:t>10/23/2026</a:t>
             </a:fld>
             <a:endParaRPr lang="en-US"/>
           </a:p>
@@ -3063,7 +3374,7 @@
           <a:p>
             <a:fld id="{5BCAD085-E8A6-8845-BD4E-CB4CCA059FC4}" type="datetimeFigureOut">
               <a:rPr lang="en-US" smtClean="0"/>
-              <a:t>10/22/2026</a:t>
+              <a:t>10/23/2026</a:t>
             </a:fld>
             <a:endParaRPr lang="en-US"/>
           </a:p>
@@ -3482,7 +3793,7 @@
           <a:p>
             <a:fld id="{5BCAD085-E8A6-8845-BD4E-CB4CCA059FC4}" type="datetimeFigureOut">
               <a:rPr lang="en-US" smtClean="0"/>
-              <a:t>10/22/2026</a:t>
+              <a:t>10/23/2026</a:t>
             </a:fld>
             <a:endParaRPr lang="en-US"/>
           </a:p>
@@ -3599,7 +3910,7 @@
           <a:p>
             <a:fld id="{5BCAD085-E8A6-8845-BD4E-CB4CCA059FC4}" type="datetimeFigureOut">
               <a:rPr lang="en-US" smtClean="0"/>
-              <a:t>10/22/2026</a:t>
+              <a:t>10/23/2026</a:t>
             </a:fld>
             <a:endParaRPr lang="en-US"/>
           </a:p>
@@ -3694,7 +4005,7 @@
           <a:p>
             <a:fld id="{5BCAD085-E8A6-8845-BD4E-CB4CCA059FC4}" type="datetimeFigureOut">
               <a:rPr lang="en-US" smtClean="0"/>
-              <a:t>10/22/2026</a:t>
+              <a:t>10/23/2026</a:t>
             </a:fld>
             <a:endParaRPr lang="en-US"/>
           </a:p>
@@ -3969,7 +4280,7 @@
           <a:p>
             <a:fld id="{5BCAD085-E8A6-8845-BD4E-CB4CCA059FC4}" type="datetimeFigureOut">
               <a:rPr lang="en-US" smtClean="0"/>
-              <a:t>10/22/2026</a:t>
+              <a:t>10/23/2026</a:t>
             </a:fld>
             <a:endParaRPr lang="en-US"/>
           </a:p>
@@ -4221,7 +4532,7 @@
           <a:p>
             <a:fld id="{5BCAD085-E8A6-8845-BD4E-CB4CCA059FC4}" type="datetimeFigureOut">
               <a:rPr lang="en-US" smtClean="0"/>
-              <a:t>10/22/2026</a:t>
+              <a:t>10/23/2026</a:t>
             </a:fld>
             <a:endParaRPr lang="en-US"/>
           </a:p>
@@ -4432,7 +4743,7 @@
           <a:p>
             <a:fld id="{5BCAD085-E8A6-8845-BD4E-CB4CCA059FC4}" type="datetimeFigureOut">
               <a:rPr lang="en-US" smtClean="0"/>
-              <a:t>10/22/2026</a:t>
+              <a:t>10/23/2026</a:t>
             </a:fld>
             <a:endParaRPr lang="en-US"/>
           </a:p>
@@ -7624,7 +7935,7 @@
               </a:spcAft>
             </a:pPr>
             <a:r>
-              <a:rPr sz="1100" b="0" i="0">
+              <a:rPr sz="1200" b="0" i="0">
                 <a:solidFill>
                   <a:srgbClr val="963700"/>
                 </a:solidFill>
@@ -7829,7 +8140,7 @@
               </a:spcAft>
             </a:pPr>
             <a:r>
-              <a:rPr sz="1100" b="0" i="0">
+              <a:rPr sz="1200" b="0" i="0">
                 <a:solidFill>
                   <a:srgbClr val="963700"/>
                 </a:solidFill>
@@ -8034,7 +8345,7 @@
               </a:spcAft>
             </a:pPr>
             <a:r>
-              <a:rPr sz="1100" b="0" i="0">
+              <a:rPr sz="1200" b="0" i="0">
                 <a:solidFill>
                   <a:srgbClr val="963700"/>
                 </a:solidFill>
@@ -8233,7 +8544,7 @@
               </a:spcAft>
             </a:pPr>
             <a:r>
-              <a:rPr sz="1100" b="0" i="0">
+              <a:rPr sz="1200" b="0" i="0">
                 <a:solidFill>
                   <a:srgbClr val="963700"/>
                 </a:solidFill>
@@ -8433,7 +8744,7 @@
               </a:spcAft>
             </a:pPr>
             <a:r>
-              <a:rPr sz="1100" b="0" i="0">
+              <a:rPr sz="1200" b="0" i="0">
                 <a:solidFill>
                   <a:srgbClr val="963700"/>
                 </a:solidFill>
@@ -8638,7 +8949,7 @@
               </a:spcAft>
             </a:pPr>
             <a:r>
-              <a:rPr sz="1100" b="0" i="0">
+              <a:rPr sz="1200" b="0" i="0">
                 <a:solidFill>
                   <a:srgbClr val="963700"/>
                 </a:solidFill>
@@ -8843,7 +9154,7 @@
               </a:spcAft>
             </a:pPr>
             <a:r>
-              <a:rPr sz="1100" b="0" i="0">
+              <a:rPr sz="1200" b="0" i="0">
                 <a:solidFill>
                   <a:srgbClr val="963700"/>
                 </a:solidFill>
@@ -9048,7 +9359,7 @@
               </a:spcAft>
             </a:pPr>
             <a:r>
-              <a:rPr sz="1100" b="0" i="0">
+              <a:rPr sz="1200" b="0" i="0">
                 <a:solidFill>
                   <a:srgbClr val="963700"/>
                 </a:solidFill>
@@ -11080,7 +11391,7 @@
               </a:spcAft>
             </a:pPr>
             <a:r>
-              <a:rPr sz="1100" b="0" i="0">
+              <a:rPr sz="1200" b="0" i="0">
                 <a:solidFill>
                   <a:srgbClr val="963700"/>
                 </a:solidFill>
@@ -11242,7 +11553,7 @@
               </a:spcAft>
             </a:pPr>
             <a:r>
-              <a:rPr sz="1100" b="0" i="0">
+              <a:rPr sz="1200" b="0" i="0">
                 <a:solidFill>
                   <a:srgbClr val="963700"/>
                 </a:solidFill>
@@ -11404,7 +11715,7 @@
               </a:spcAft>
             </a:pPr>
             <a:r>
-              <a:rPr sz="1100" b="0" i="0">
+              <a:rPr sz="1200" b="0" i="0">
                 <a:solidFill>
                   <a:srgbClr val="963700"/>
                 </a:solidFill>
@@ -11566,7 +11877,7 @@
               </a:spcAft>
             </a:pPr>
             <a:r>
-              <a:rPr sz="1100" b="0" i="0">
+              <a:rPr sz="1200" b="0" i="0">
                 <a:solidFill>
                   <a:srgbClr val="963700"/>
                 </a:solidFill>
@@ -15428,7 +15739,7 @@
         </p:nvSpPr>
         <p:spPr>
           <a:xfrm>
-            <a:off x="786384" y="3090672"/>
+            <a:off x="786384" y="3185922"/>
             <a:ext cx="2971800" cy="274320"/>
           </a:xfrm>
           <a:prstGeom prst="rect">
@@ -17026,7 +17337,7 @@
         </p:nvSpPr>
         <p:spPr>
           <a:xfrm>
-            <a:off x="1201054" y="2327648"/>
+            <a:off x="1201054" y="2387179"/>
             <a:ext cx="4526280" cy="502920"/>
           </a:xfrm>
           <a:prstGeom prst="rect">
@@ -17050,7 +17361,7 @@
               </a:spcAft>
             </a:pPr>
             <a:r>
-              <a:rPr sz="1400" b="0" i="0">
+              <a:rPr sz="1600" b="0" i="0">
                 <a:solidFill>
                   <a:srgbClr val="4F5361"/>
                 </a:solidFill>
@@ -17188,7 +17499,7 @@
         </p:nvSpPr>
         <p:spPr>
           <a:xfrm>
-            <a:off x="6842903" y="2327648"/>
+            <a:off x="6842903" y="2387179"/>
             <a:ext cx="4526280" cy="502920"/>
           </a:xfrm>
           <a:prstGeom prst="rect">
@@ -17212,7 +17523,7 @@
               </a:spcAft>
             </a:pPr>
             <a:r>
-              <a:rPr sz="1400" b="0" i="0">
+              <a:rPr sz="1600" b="0" i="0">
                 <a:solidFill>
                   <a:srgbClr val="4F5361"/>
                 </a:solidFill>
@@ -17426,7 +17737,7 @@
         </p:nvSpPr>
         <p:spPr>
           <a:xfrm>
-            <a:off x="1160191" y="3589520"/>
+            <a:off x="1160191" y="3649051"/>
             <a:ext cx="4468162" cy="502920"/>
           </a:xfrm>
           <a:prstGeom prst="rect">
@@ -17450,7 +17761,7 @@
               </a:spcAft>
             </a:pPr>
             <a:r>
-              <a:rPr sz="1400" b="0" i="0">
+              <a:rPr sz="1600" b="0" i="0">
                 <a:solidFill>
                   <a:srgbClr val="4F5361"/>
                 </a:solidFill>
@@ -17512,7 +17823,7 @@
         </p:nvSpPr>
         <p:spPr>
           <a:xfrm>
-            <a:off x="6806274" y="3585697"/>
+            <a:off x="6806274" y="3645228"/>
             <a:ext cx="4526280" cy="502920"/>
           </a:xfrm>
           <a:prstGeom prst="rect">
@@ -17536,7 +17847,7 @@
               </a:spcAft>
             </a:pPr>
             <a:r>
-              <a:rPr sz="1400" b="0" i="0">
+              <a:rPr sz="1600" b="0" i="0">
                 <a:solidFill>
                   <a:srgbClr val="4F5361"/>
                 </a:solidFill>
@@ -17904,7 +18215,7 @@
           <a:lstStyle/>
           <a:p>
             <a:pPr algn="ctr"/>
-            <a:endParaRPr/>
+            <a:endParaRPr sz="2000"/>
           </a:p>
         </p:txBody>
       </p:sp>
@@ -17940,7 +18251,7 @@
               </a:spcAft>
             </a:pPr>
             <a:r>
-              <a:rPr sz="950" b="0" i="0" spc="110">
+              <a:rPr sz="1000" b="0" i="0" spc="110">
                 <a:solidFill>
                   <a:srgbClr val="963700"/>
                 </a:solidFill>
@@ -17959,7 +18270,7 @@
         </p:nvSpPr>
         <p:spPr>
           <a:xfrm>
-            <a:off x="566928" y="521207"/>
+            <a:off x="566928" y="479535"/>
             <a:ext cx="11064240" cy="640080"/>
           </a:xfrm>
           <a:prstGeom prst="rect">
@@ -17983,7 +18294,7 @@
               </a:spcAft>
             </a:pPr>
             <a:r>
-              <a:rPr sz="3600" b="0" i="0">
+              <a:rPr sz="4000" b="0" i="0">
                 <a:solidFill>
                   <a:srgbClr val="131315"/>
                 </a:solidFill>
@@ -18026,7 +18337,7 @@
               </a:spcAft>
             </a:pPr>
             <a:r>
-              <a:rPr sz="1400" b="0" i="0">
+              <a:rPr sz="1600" b="0" i="0">
                 <a:solidFill>
                   <a:srgbClr val="4F5361"/>
                 </a:solidFill>
@@ -18074,7 +18385,7 @@
               <a:buChar char="•"/>
             </a:pPr>
             <a:r>
-              <a:rPr sz="1100" b="0" i="0">
+              <a:rPr sz="1200" b="0" i="0">
                 <a:solidFill>
                   <a:srgbClr val="131315"/>
                 </a:solidFill>
@@ -18101,7 +18412,7 @@
               <a:buChar char="•"/>
             </a:pPr>
             <a:r>
-              <a:rPr sz="1100" b="0" i="0">
+              <a:rPr sz="1200" b="0" i="0">
                 <a:solidFill>
                   <a:srgbClr val="131315"/>
                 </a:solidFill>
@@ -18128,7 +18439,7 @@
               <a:buChar char="•"/>
             </a:pPr>
             <a:r>
-              <a:rPr sz="1100" b="0" i="0">
+              <a:rPr sz="1200" b="0" i="0">
                 <a:solidFill>
                   <a:srgbClr val="131315"/>
                 </a:solidFill>
@@ -18176,7 +18487,7 @@
               <a:buChar char="•"/>
             </a:pPr>
             <a:r>
-              <a:rPr sz="1100" b="0" i="0">
+              <a:rPr sz="1200" b="0" i="0">
                 <a:solidFill>
                   <a:srgbClr val="131315"/>
                 </a:solidFill>
@@ -18203,7 +18514,7 @@
               <a:buChar char="•"/>
             </a:pPr>
             <a:r>
-              <a:rPr sz="1100" b="0" i="0">
+              <a:rPr sz="1200" b="0" i="0">
                 <a:solidFill>
                   <a:srgbClr val="131315"/>
                 </a:solidFill>
@@ -18230,7 +18541,7 @@
               <a:buChar char="•"/>
             </a:pPr>
             <a:r>
-              <a:rPr sz="1100" b="0" i="0">
+              <a:rPr sz="1200" b="0" i="0">
                 <a:solidFill>
                   <a:srgbClr val="131315"/>
                 </a:solidFill>
@@ -18270,7 +18581,7 @@
           <a:lstStyle/>
           <a:p>
             <a:pPr algn="ctr"/>
-            <a:endParaRPr sz="2400"/>
+            <a:endParaRPr sz="2800"/>
           </a:p>
         </p:txBody>
       </p:sp>
@@ -18306,7 +18617,7 @@
               </a:spcAft>
             </a:pPr>
             <a:r>
-              <a:rPr sz="1000" b="0" i="0">
+              <a:rPr sz="1050" b="0" i="0">
                 <a:solidFill>
                   <a:srgbClr val="963700"/>
                 </a:solidFill>
@@ -18349,7 +18660,7 @@
               </a:spcAft>
             </a:pPr>
             <a:r>
-              <a:rPr sz="1000" b="0" i="0">
+              <a:rPr sz="1050" b="0" i="0">
                 <a:solidFill>
                   <a:srgbClr val="131315"/>
                 </a:solidFill>
@@ -18371,7 +18682,7 @@
               </a:spcAft>
             </a:pPr>
             <a:r>
-              <a:rPr sz="1000" b="0" i="0">
+              <a:rPr sz="1050" b="0" i="0">
                 <a:solidFill>
                   <a:srgbClr val="131315"/>
                 </a:solidFill>
@@ -18393,7 +18704,7 @@
               </a:spcAft>
             </a:pPr>
             <a:r>
-              <a:rPr sz="1000" b="0" i="0">
+              <a:rPr sz="1050" b="0" i="0">
                 <a:solidFill>
                   <a:srgbClr val="131315"/>
                 </a:solidFill>
@@ -18415,7 +18726,7 @@
               </a:spcAft>
             </a:pPr>
             <a:r>
-              <a:rPr sz="1000" b="0" i="0">
+              <a:rPr sz="1050" b="0" i="0">
                 <a:solidFill>
                   <a:srgbClr val="131315"/>
                 </a:solidFill>
@@ -18455,7 +18766,7 @@
           <a:lstStyle/>
           <a:p>
             <a:pPr algn="ctr"/>
-            <a:endParaRPr sz="2400"/>
+            <a:endParaRPr sz="2800"/>
           </a:p>
         </p:txBody>
       </p:sp>
@@ -18491,7 +18802,7 @@
               </a:spcAft>
             </a:pPr>
             <a:r>
-              <a:rPr sz="1000" b="0" i="0">
+              <a:rPr sz="1050" b="0" i="0">
                 <a:solidFill>
                   <a:srgbClr val="963700"/>
                 </a:solidFill>
@@ -18534,7 +18845,7 @@
               </a:spcAft>
             </a:pPr>
             <a:r>
-              <a:rPr sz="1000" b="0" i="0">
+              <a:rPr sz="1050" b="0" i="0">
                 <a:solidFill>
                   <a:srgbClr val="31324A"/>
                 </a:solidFill>
@@ -18574,7 +18885,7 @@
           <a:lstStyle/>
           <a:p>
             <a:pPr algn="ctr"/>
-            <a:endParaRPr sz="2400"/>
+            <a:endParaRPr sz="2800"/>
           </a:p>
         </p:txBody>
       </p:sp>
@@ -18610,7 +18921,7 @@
               </a:spcAft>
             </a:pPr>
             <a:r>
-              <a:rPr sz="1000" b="0" i="0">
+              <a:rPr sz="1050" b="0" i="0">
                 <a:solidFill>
                   <a:srgbClr val="4F5361"/>
                 </a:solidFill>
@@ -18653,7 +18964,7 @@
               </a:spcAft>
             </a:pPr>
             <a:r>
-              <a:rPr sz="1000" b="0" i="0">
+              <a:rPr sz="1050" b="0" i="0">
                 <a:solidFill>
                   <a:srgbClr val="4F5361"/>
                 </a:solidFill>
